--- a/Презентация.pptx
+++ b/Презентация.pptx
@@ -15,9 +15,8 @@
     <p:sldId id="269" r:id="rId9"/>
     <p:sldId id="270" r:id="rId10"/>
     <p:sldId id="265" r:id="rId11"/>
-    <p:sldId id="266" r:id="rId12"/>
-    <p:sldId id="267" r:id="rId13"/>
-    <p:sldId id="268" r:id="rId14"/>
+    <p:sldId id="267" r:id="rId12"/>
+    <p:sldId id="268" r:id="rId13"/>
   </p:sldIdLst>
   <p:sldSz cx="12192000" cy="6858000"/>
   <p:notesSz cx="6858000" cy="9144000"/>
@@ -3402,41 +3401,6 @@
           </a:p>
         </p:txBody>
       </p:sp>
-      <p:sp>
-        <p:nvSpPr>
-          <p:cNvPr id="9" name="TextBox 8"/>
-          <p:cNvSpPr txBox="1"/>
-          <p:nvPr/>
-        </p:nvSpPr>
-        <p:spPr>
-          <a:xfrm>
-            <a:off x="5440680" y="6473952"/>
-            <a:ext cx="1325880" cy="228600"/>
-          </a:xfrm>
-          <a:prstGeom prst="rect">
-            <a:avLst/>
-          </a:prstGeom>
-          <a:noFill/>
-        </p:spPr>
-        <p:txBody>
-          <a:bodyPr wrap="square">
-            <a:spAutoFit/>
-          </a:bodyPr>
-          <a:lstStyle/>
-          <a:p>
-            <a:pPr algn="ctr"/>
-            <a:r>
-              <a:rPr sz="1100" b="0">
-                <a:solidFill>
-                  <a:srgbClr val="DCF0ED"/>
-                </a:solidFill>
-                <a:latin typeface="Arial"/>
-              </a:rPr>
-              <a:t>предзащита</a:t>
-            </a:r>
-          </a:p>
-        </p:txBody>
-      </p:sp>
     </p:spTree>
   </p:cSld>
   <p:clrMapOvr>
@@ -4162,7 +4126,7 @@
                 </a:solidFill>
                 <a:latin typeface="Arial"/>
               </a:rPr>
-              <a:t>Результат проверки</a:t>
+              <a:t>Испытания и ограничения</a:t>
             </a:r>
           </a:p>
         </p:txBody>
@@ -4243,7 +4207,7 @@
                 </a:solidFill>
                 <a:latin typeface="Arial"/>
               </a:rPr>
-              <a:t>10</a:t>
+              <a:t>11</a:t>
             </a:r>
           </a:p>
         </p:txBody>
@@ -4256,14 +4220,14 @@
         </p:nvSpPr>
         <p:spPr>
           <a:xfrm>
-            <a:off x="822960" y="1463040"/>
-            <a:ext cx="2423160" cy="1143000"/>
+            <a:off x="777240" y="1325880"/>
+            <a:ext cx="5303520" cy="4114800"/>
           </a:xfrm>
           <a:prstGeom prst="roundRect">
             <a:avLst/>
           </a:prstGeom>
           <a:solidFill>
-            <a:srgbClr val="FFFDF8"/>
+            <a:srgbClr val="E8F4F0"/>
           </a:solidFill>
           <a:ln>
             <a:solidFill>
@@ -4302,8 +4266,8 @@
         </p:nvSpPr>
         <p:spPr>
           <a:xfrm>
-            <a:off x="987552" y="1664208"/>
-            <a:ext cx="2057400" cy="274320"/>
+            <a:off x="1097280" y="1627632"/>
+            <a:ext cx="4663440" cy="320040"/>
           </a:xfrm>
           <a:prstGeom prst="rect">
             <a:avLst/>
@@ -4318,13 +4282,13 @@
           <a:p>
             <a:pPr algn="ctr"/>
             <a:r>
-              <a:rPr sz="1300" b="0">
-                <a:solidFill>
-                  <a:srgbClr val="5B626E"/>
-                </a:solidFill>
-                <a:latin typeface="Arial"/>
-              </a:rPr>
-              <a:t>Оригинальность</a:t>
+              <a:rPr sz="2000" b="1">
+                <a:solidFill>
+                  <a:srgbClr val="0F766E"/>
+                </a:solidFill>
+                <a:latin typeface="Arial"/>
+              </a:rPr>
+              <a:t>Проверенные сценарии</a:t>
             </a:r>
           </a:p>
         </p:txBody>
@@ -4337,8 +4301,8 @@
         </p:nvSpPr>
         <p:spPr>
           <a:xfrm>
-            <a:off x="987552" y="1993392"/>
-            <a:ext cx="2057400" cy="329184"/>
+            <a:off x="1097280" y="2148840"/>
+            <a:ext cx="4617720" cy="2560320"/>
           </a:xfrm>
           <a:prstGeom prst="rect">
             <a:avLst/>
@@ -4351,15 +4315,83 @@
           </a:bodyPr>
           <a:lstStyle/>
           <a:p>
-            <a:pPr algn="ctr"/>
-            <a:r>
-              <a:rPr sz="2000" b="1">
-                <a:solidFill>
-                  <a:srgbClr val="0F766E"/>
-                </a:solidFill>
-                <a:latin typeface="Arial"/>
-              </a:rPr>
-              <a:t>33.33%</a:t>
+            <a:pPr>
+              <a:spcAft>
+                <a:spcPts val="400"/>
+              </a:spcAft>
+            </a:pPr>
+            <a:r>
+              <a:rPr sz="1500">
+                <a:solidFill>
+                  <a:srgbClr val="1F2937"/>
+                </a:solidFill>
+                <a:latin typeface="Arial"/>
+              </a:rPr>
+              <a:t>• создание пользователя и добавление документов</a:t>
+            </a:r>
+          </a:p>
+          <a:p>
+            <a:pPr>
+              <a:spcAft>
+                <a:spcPts val="400"/>
+              </a:spcAft>
+            </a:pPr>
+            <a:r>
+              <a:rPr sz="1500">
+                <a:solidFill>
+                  <a:srgbClr val="1F2937"/>
+                </a:solidFill>
+                <a:latin typeface="Arial"/>
+              </a:rPr>
+              <a:t>• проверка текста с найденными совпадениями</a:t>
+            </a:r>
+          </a:p>
+          <a:p>
+            <a:pPr>
+              <a:spcAft>
+                <a:spcPts val="400"/>
+              </a:spcAft>
+            </a:pPr>
+            <a:r>
+              <a:rPr sz="1500">
+                <a:solidFill>
+                  <a:srgbClr val="1F2937"/>
+                </a:solidFill>
+                <a:latin typeface="Arial"/>
+              </a:rPr>
+              <a:t>• применение правил исключений</a:t>
+            </a:r>
+          </a:p>
+          <a:p>
+            <a:pPr>
+              <a:spcAft>
+                <a:spcPts val="400"/>
+              </a:spcAft>
+            </a:pPr>
+            <a:r>
+              <a:rPr sz="1500">
+                <a:solidFill>
+                  <a:srgbClr val="1F2937"/>
+                </a:solidFill>
+                <a:latin typeface="Arial"/>
+              </a:rPr>
+              <a:t>• формирование архива уникальных работ</a:t>
+            </a:r>
+          </a:p>
+          <a:p>
+            <a:pPr>
+              <a:spcAft>
+                <a:spcPts val="400"/>
+              </a:spcAft>
+            </a:pPr>
+            <a:r>
+              <a:rPr sz="1500">
+                <a:solidFill>
+                  <a:srgbClr val="1F2937"/>
+                </a:solidFill>
+                <a:latin typeface="Arial"/>
+              </a:rPr>
+              <a:t>• корректная ошибка для PDF без текстового слоя</a:t>
             </a:r>
           </a:p>
         </p:txBody>
@@ -4372,18 +4404,18 @@
         </p:nvSpPr>
         <p:spPr>
           <a:xfrm>
-            <a:off x="3611879" y="1463040"/>
-            <a:ext cx="2423160" cy="1143000"/>
+            <a:off x="6537960" y="1325880"/>
+            <a:ext cx="4572000" cy="4114800"/>
           </a:xfrm>
           <a:prstGeom prst="roundRect">
             <a:avLst/>
           </a:prstGeom>
           <a:solidFill>
-            <a:srgbClr val="FFFDF8"/>
+            <a:srgbClr val="FFFAF1"/>
           </a:solidFill>
           <a:ln>
             <a:solidFill>
-              <a:srgbClr val="DACFBD"/>
+              <a:srgbClr val="E8D1AE"/>
             </a:solidFill>
           </a:ln>
         </p:spPr>
@@ -4418,8 +4450,8 @@
         </p:nvSpPr>
         <p:spPr>
           <a:xfrm>
-            <a:off x="3776472" y="1664208"/>
-            <a:ext cx="2057400" cy="274320"/>
+            <a:off x="6812280" y="1627632"/>
+            <a:ext cx="4023360" cy="320040"/>
           </a:xfrm>
           <a:prstGeom prst="rect">
             <a:avLst/>
@@ -4434,13 +4466,13 @@
           <a:p>
             <a:pPr algn="ctr"/>
             <a:r>
-              <a:rPr sz="1300" b="0">
-                <a:solidFill>
-                  <a:srgbClr val="5B626E"/>
-                </a:solidFill>
-                <a:latin typeface="Arial"/>
-              </a:rPr>
-              <a:t>Совпавшие слова</a:t>
+              <a:rPr sz="2000" b="1">
+                <a:solidFill>
+                  <a:srgbClr val="B45309"/>
+                </a:solidFill>
+                <a:latin typeface="Arial"/>
+              </a:rPr>
+              <a:t>Ограничения версии</a:t>
             </a:r>
           </a:p>
         </p:txBody>
@@ -4453,8 +4485,8 @@
         </p:nvSpPr>
         <p:spPr>
           <a:xfrm>
-            <a:off x="3776472" y="1993392"/>
-            <a:ext cx="2057400" cy="329184"/>
+            <a:off x="6812280" y="2240280"/>
+            <a:ext cx="3977639" cy="1463040"/>
           </a:xfrm>
           <a:prstGeom prst="rect">
             <a:avLst/>
@@ -4467,75 +4499,49 @@
           </a:bodyPr>
           <a:lstStyle/>
           <a:p>
-            <a:pPr algn="ctr"/>
-            <a:r>
-              <a:rPr sz="2000" b="1">
-                <a:solidFill>
-                  <a:srgbClr val="B45309"/>
-                </a:solidFill>
-                <a:latin typeface="Arial"/>
-              </a:rPr>
-              <a:t>12 из 18</a:t>
-            </a:r>
-          </a:p>
-        </p:txBody>
-      </p:sp>
-      <p:sp>
-        <p:nvSpPr>
-          <p:cNvPr id="13" name="Rounded Rectangle 12"/>
-          <p:cNvSpPr/>
-          <p:nvPr/>
-        </p:nvSpPr>
-        <p:spPr>
-          <a:xfrm>
-            <a:off x="6400800" y="1463040"/>
-            <a:ext cx="2423160" cy="1143000"/>
-          </a:xfrm>
-          <a:prstGeom prst="roundRect">
-            <a:avLst/>
-          </a:prstGeom>
-          <a:solidFill>
-            <a:srgbClr val="FFFDF8"/>
-          </a:solidFill>
-          <a:ln>
-            <a:solidFill>
-              <a:srgbClr val="DACFBD"/>
-            </a:solidFill>
-          </a:ln>
-        </p:spPr>
-        <p:style>
-          <a:lnRef idx="1">
-            <a:schemeClr val="accent1"/>
-          </a:lnRef>
-          <a:fillRef idx="3">
-            <a:schemeClr val="accent1"/>
-          </a:fillRef>
-          <a:effectRef idx="2">
-            <a:schemeClr val="accent1"/>
-          </a:effectRef>
-          <a:fontRef idx="minor">
-            <a:schemeClr val="lt1"/>
-          </a:fontRef>
-        </p:style>
-        <p:txBody>
-          <a:bodyPr rtlCol="0" anchor="ctr"/>
-          <a:lstStyle/>
-          <a:p>
-            <a:pPr algn="ctr"/>
-            <a:endParaRPr/>
-          </a:p>
-        </p:txBody>
-      </p:sp>
-      <p:sp>
-        <p:nvSpPr>
-          <p:cNvPr id="14" name="TextBox 13"/>
+            <a:pPr>
+              <a:spcAft>
+                <a:spcPts val="800"/>
+              </a:spcAft>
+            </a:pPr>
+            <a:r>
+              <a:rPr sz="1600">
+                <a:solidFill>
+                  <a:srgbClr val="1F2937"/>
+                </a:solidFill>
+                <a:latin typeface="Arial"/>
+              </a:rPr>
+              <a:t>• сканированные PDF пока не распознаются</a:t>
+            </a:r>
+          </a:p>
+          <a:p>
+            <a:pPr>
+              <a:spcAft>
+                <a:spcPts val="800"/>
+              </a:spcAft>
+            </a:pPr>
+            <a:r>
+              <a:rPr sz="1600">
+                <a:solidFill>
+                  <a:srgbClr val="1F2937"/>
+                </a:solidFill>
+                <a:latin typeface="Arial"/>
+              </a:rPr>
+              <a:t>• глубокое перефразирование требует более сложного семантического анализа</a:t>
+            </a:r>
+          </a:p>
+        </p:txBody>
+      </p:sp>
+      <p:sp>
+        <p:nvSpPr>
+          <p:cNvPr id="13" name="TextBox 12"/>
           <p:cNvSpPr txBox="1"/>
           <p:nvPr/>
         </p:nvSpPr>
         <p:spPr>
           <a:xfrm>
-            <a:off x="6565392" y="1664208"/>
-            <a:ext cx="2057400" cy="274320"/>
+            <a:off x="6812280" y="4069080"/>
+            <a:ext cx="3931920" cy="502920"/>
           </a:xfrm>
           <a:prstGeom prst="rect">
             <a:avLst/>
@@ -4550,326 +4556,13 @@
           <a:p>
             <a:pPr algn="ctr"/>
             <a:r>
-              <a:rPr sz="1300" b="0">
+              <a:rPr sz="1500" b="0">
                 <a:solidFill>
                   <a:srgbClr val="5B626E"/>
                 </a:solidFill>
                 <a:latin typeface="Arial"/>
               </a:rPr>
-              <a:t>Источники</a:t>
-            </a:r>
-          </a:p>
-        </p:txBody>
-      </p:sp>
-      <p:sp>
-        <p:nvSpPr>
-          <p:cNvPr id="15" name="TextBox 14"/>
-          <p:cNvSpPr txBox="1"/>
-          <p:nvPr/>
-        </p:nvSpPr>
-        <p:spPr>
-          <a:xfrm>
-            <a:off x="6565392" y="1993392"/>
-            <a:ext cx="2057400" cy="329184"/>
-          </a:xfrm>
-          <a:prstGeom prst="rect">
-            <a:avLst/>
-          </a:prstGeom>
-          <a:noFill/>
-        </p:spPr>
-        <p:txBody>
-          <a:bodyPr wrap="square">
-            <a:spAutoFit/>
-          </a:bodyPr>
-          <a:lstStyle/>
-          <a:p>
-            <a:pPr algn="ctr"/>
-            <a:r>
-              <a:rPr sz="2000" b="1">
-                <a:solidFill>
-                  <a:srgbClr val="2563EB"/>
-                </a:solidFill>
-                <a:latin typeface="Arial"/>
-              </a:rPr>
-              <a:t>1 документ</a:t>
-            </a:r>
-          </a:p>
-        </p:txBody>
-      </p:sp>
-      <p:sp>
-        <p:nvSpPr>
-          <p:cNvPr id="16" name="Rounded Rectangle 15"/>
-          <p:cNvSpPr/>
-          <p:nvPr/>
-        </p:nvSpPr>
-        <p:spPr>
-          <a:xfrm>
-            <a:off x="9189719" y="1463040"/>
-            <a:ext cx="2423160" cy="1143000"/>
-          </a:xfrm>
-          <a:prstGeom prst="roundRect">
-            <a:avLst/>
-          </a:prstGeom>
-          <a:solidFill>
-            <a:srgbClr val="FFFDF8"/>
-          </a:solidFill>
-          <a:ln>
-            <a:solidFill>
-              <a:srgbClr val="DACFBD"/>
-            </a:solidFill>
-          </a:ln>
-        </p:spPr>
-        <p:style>
-          <a:lnRef idx="1">
-            <a:schemeClr val="accent1"/>
-          </a:lnRef>
-          <a:fillRef idx="3">
-            <a:schemeClr val="accent1"/>
-          </a:fillRef>
-          <a:effectRef idx="2">
-            <a:schemeClr val="accent1"/>
-          </a:effectRef>
-          <a:fontRef idx="minor">
-            <a:schemeClr val="lt1"/>
-          </a:fontRef>
-        </p:style>
-        <p:txBody>
-          <a:bodyPr rtlCol="0" anchor="ctr"/>
-          <a:lstStyle/>
-          <a:p>
-            <a:pPr algn="ctr"/>
-            <a:endParaRPr/>
-          </a:p>
-        </p:txBody>
-      </p:sp>
-      <p:sp>
-        <p:nvSpPr>
-          <p:cNvPr id="17" name="TextBox 16"/>
-          <p:cNvSpPr txBox="1"/>
-          <p:nvPr/>
-        </p:nvSpPr>
-        <p:spPr>
-          <a:xfrm>
-            <a:off x="9354311" y="1664208"/>
-            <a:ext cx="2057400" cy="274320"/>
-          </a:xfrm>
-          <a:prstGeom prst="rect">
-            <a:avLst/>
-          </a:prstGeom>
-          <a:noFill/>
-        </p:spPr>
-        <p:txBody>
-          <a:bodyPr wrap="square">
-            <a:spAutoFit/>
-          </a:bodyPr>
-          <a:lstStyle/>
-          <a:p>
-            <a:pPr algn="ctr"/>
-            <a:r>
-              <a:rPr sz="1300" b="0">
-                <a:solidFill>
-                  <a:srgbClr val="5B626E"/>
-                </a:solidFill>
-                <a:latin typeface="Arial"/>
-              </a:rPr>
-              <a:t>Отчёт</a:t>
-            </a:r>
-          </a:p>
-        </p:txBody>
-      </p:sp>
-      <p:sp>
-        <p:nvSpPr>
-          <p:cNvPr id="18" name="TextBox 17"/>
-          <p:cNvSpPr txBox="1"/>
-          <p:nvPr/>
-        </p:nvSpPr>
-        <p:spPr>
-          <a:xfrm>
-            <a:off x="9354311" y="1993392"/>
-            <a:ext cx="2057400" cy="329184"/>
-          </a:xfrm>
-          <a:prstGeom prst="rect">
-            <a:avLst/>
-          </a:prstGeom>
-          <a:noFill/>
-        </p:spPr>
-        <p:txBody>
-          <a:bodyPr wrap="square">
-            <a:spAutoFit/>
-          </a:bodyPr>
-          <a:lstStyle/>
-          <a:p>
-            <a:pPr algn="ctr"/>
-            <a:r>
-              <a:rPr sz="2000" b="1">
-                <a:solidFill>
-                  <a:srgbClr val="65A30D"/>
-                </a:solidFill>
-                <a:latin typeface="Arial"/>
-              </a:rPr>
-              <a:t>подсветка текста</a:t>
-            </a:r>
-          </a:p>
-        </p:txBody>
-      </p:sp>
-      <p:sp>
-        <p:nvSpPr>
-          <p:cNvPr id="19" name="Rounded Rectangle 18"/>
-          <p:cNvSpPr/>
-          <p:nvPr/>
-        </p:nvSpPr>
-        <p:spPr>
-          <a:xfrm>
-            <a:off x="914400" y="3246120"/>
-            <a:ext cx="10287000" cy="1508760"/>
-          </a:xfrm>
-          <a:prstGeom prst="roundRect">
-            <a:avLst/>
-          </a:prstGeom>
-          <a:solidFill>
-            <a:srgbClr val="FFFDF8"/>
-          </a:solidFill>
-          <a:ln>
-            <a:solidFill>
-              <a:srgbClr val="DACFBD"/>
-            </a:solidFill>
-          </a:ln>
-        </p:spPr>
-        <p:style>
-          <a:lnRef idx="1">
-            <a:schemeClr val="accent1"/>
-          </a:lnRef>
-          <a:fillRef idx="3">
-            <a:schemeClr val="accent1"/>
-          </a:fillRef>
-          <a:effectRef idx="2">
-            <a:schemeClr val="accent1"/>
-          </a:effectRef>
-          <a:fontRef idx="minor">
-            <a:schemeClr val="lt1"/>
-          </a:fontRef>
-        </p:style>
-        <p:txBody>
-          <a:bodyPr rtlCol="0" anchor="ctr"/>
-          <a:lstStyle/>
-          <a:p>
-            <a:pPr algn="ctr"/>
-            <a:endParaRPr/>
-          </a:p>
-        </p:txBody>
-      </p:sp>
-      <p:sp>
-        <p:nvSpPr>
-          <p:cNvPr id="20" name="TextBox 19"/>
-          <p:cNvSpPr txBox="1"/>
-          <p:nvPr/>
-        </p:nvSpPr>
-        <p:spPr>
-          <a:xfrm>
-            <a:off x="1234440" y="3520440"/>
-            <a:ext cx="9646920" cy="320040"/>
-          </a:xfrm>
-          <a:prstGeom prst="rect">
-            <a:avLst/>
-          </a:prstGeom>
-          <a:noFill/>
-        </p:spPr>
-        <p:txBody>
-          <a:bodyPr wrap="square">
-            <a:spAutoFit/>
-          </a:bodyPr>
-          <a:lstStyle/>
-          <a:p>
-            <a:pPr algn="ctr"/>
-            <a:r>
-              <a:rPr sz="1900" b="1">
-                <a:solidFill>
-                  <a:srgbClr val="1F2937"/>
-                </a:solidFill>
-                <a:latin typeface="Arial"/>
-              </a:rPr>
-              <a:t>Фрагменты с совпадениями выделяются прямо в тексте, а рядом показываются источники.</a:t>
-            </a:r>
-          </a:p>
-        </p:txBody>
-      </p:sp>
-      <p:sp>
-        <p:nvSpPr>
-          <p:cNvPr id="21" name="Rectangle 20"/>
-          <p:cNvSpPr/>
-          <p:nvPr/>
-        </p:nvSpPr>
-        <p:spPr>
-          <a:xfrm>
-            <a:off x="4069080" y="4041648"/>
-            <a:ext cx="4114800" cy="310896"/>
-          </a:xfrm>
-          <a:prstGeom prst="rect">
-            <a:avLst/>
-          </a:prstGeom>
-          <a:solidFill>
-            <a:srgbClr val="FACC15"/>
-          </a:solidFill>
-          <a:ln>
-            <a:solidFill>
-              <a:srgbClr val="FACC15"/>
-            </a:solidFill>
-          </a:ln>
-        </p:spPr>
-        <p:style>
-          <a:lnRef idx="1">
-            <a:schemeClr val="accent1"/>
-          </a:lnRef>
-          <a:fillRef idx="3">
-            <a:schemeClr val="accent1"/>
-          </a:fillRef>
-          <a:effectRef idx="2">
-            <a:schemeClr val="accent1"/>
-          </a:effectRef>
-          <a:fontRef idx="minor">
-            <a:schemeClr val="lt1"/>
-          </a:fontRef>
-        </p:style>
-        <p:txBody>
-          <a:bodyPr rtlCol="0" anchor="ctr"/>
-          <a:lstStyle/>
-          <a:p>
-            <a:pPr algn="ctr"/>
-            <a:endParaRPr/>
-          </a:p>
-        </p:txBody>
-      </p:sp>
-      <p:sp>
-        <p:nvSpPr>
-          <p:cNvPr id="22" name="TextBox 21"/>
-          <p:cNvSpPr txBox="1"/>
-          <p:nvPr/>
-        </p:nvSpPr>
-        <p:spPr>
-          <a:xfrm>
-            <a:off x="4096512" y="4069080"/>
-            <a:ext cx="4041648" cy="228600"/>
-          </a:xfrm>
-          <a:prstGeom prst="rect">
-            <a:avLst/>
-          </a:prstGeom>
-          <a:noFill/>
-        </p:spPr>
-        <p:txBody>
-          <a:bodyPr wrap="square">
-            <a:spAutoFit/>
-          </a:bodyPr>
-          <a:lstStyle/>
-          <a:p>
-            <a:pPr algn="ctr"/>
-            <a:r>
-              <a:rPr sz="1200" b="1">
-                <a:solidFill>
-                  <a:srgbClr val="1F2937"/>
-                </a:solidFill>
-                <a:latin typeface="Arial"/>
-              </a:rPr>
-              <a:t>совпадающий фрагмент учебной работы</a:t>
+              <a:t>Ограничения зафиксированы и могут быть закрыты в следующих версиях.</a:t>
             </a:r>
           </a:p>
         </p:txBody>
@@ -5024,7 +4717,7 @@
                 </a:solidFill>
                 <a:latin typeface="Arial"/>
               </a:rPr>
-              <a:t>Испытания и ограничения</a:t>
+              <a:t>Заключение</a:t>
             </a:r>
           </a:p>
         </p:txBody>
@@ -5105,21 +4798,690 @@
                 </a:solidFill>
                 <a:latin typeface="Arial"/>
               </a:rPr>
-              <a:t>11</a:t>
-            </a:r>
-          </a:p>
-        </p:txBody>
-      </p:sp>
-      <p:sp>
-        <p:nvSpPr>
-          <p:cNvPr id="7" name="Rounded Rectangle 6"/>
+              <a:t>12</a:t>
+            </a:r>
+          </a:p>
+        </p:txBody>
+      </p:sp>
+      <p:sp>
+        <p:nvSpPr>
+          <p:cNvPr id="7" name="TextBox 6"/>
+          <p:cNvSpPr txBox="1"/>
+          <p:nvPr/>
+        </p:nvSpPr>
+        <p:spPr>
+          <a:xfrm>
+            <a:off x="777240" y="1325880"/>
+            <a:ext cx="6583680" cy="2880360"/>
+          </a:xfrm>
+          <a:prstGeom prst="rect">
+            <a:avLst/>
+          </a:prstGeom>
+          <a:noFill/>
+        </p:spPr>
+        <p:txBody>
+          <a:bodyPr wrap="square">
+            <a:spAutoFit/>
+          </a:bodyPr>
+          <a:lstStyle/>
+          <a:p>
+            <a:pPr>
+              <a:spcAft>
+                <a:spcPts val="800"/>
+              </a:spcAft>
+            </a:pPr>
+            <a:r>
+              <a:rPr sz="1750" dirty="0">
+                <a:solidFill>
+                  <a:srgbClr val="1F2937"/>
+                </a:solidFill>
+                <a:latin typeface="Arial"/>
+              </a:rPr>
+              <a:t>• </a:t>
+            </a:r>
+            <a:r>
+              <a:rPr sz="1750" dirty="0" err="1">
+                <a:solidFill>
+                  <a:srgbClr val="1F2937"/>
+                </a:solidFill>
+                <a:latin typeface="Arial"/>
+              </a:rPr>
+              <a:t>реализована</a:t>
+            </a:r>
+            <a:r>
+              <a:rPr sz="1750" dirty="0">
+                <a:solidFill>
+                  <a:srgbClr val="1F2937"/>
+                </a:solidFill>
+                <a:latin typeface="Arial"/>
+              </a:rPr>
+              <a:t> </a:t>
+            </a:r>
+            <a:r>
+              <a:rPr sz="1750" dirty="0" err="1">
+                <a:solidFill>
+                  <a:srgbClr val="1F2937"/>
+                </a:solidFill>
+                <a:latin typeface="Arial"/>
+              </a:rPr>
+              <a:t>локальная</a:t>
+            </a:r>
+            <a:r>
+              <a:rPr sz="1750" dirty="0">
+                <a:solidFill>
+                  <a:srgbClr val="1F2937"/>
+                </a:solidFill>
+                <a:latin typeface="Arial"/>
+              </a:rPr>
+              <a:t> </a:t>
+            </a:r>
+            <a:r>
+              <a:rPr sz="1750" dirty="0" err="1">
+                <a:solidFill>
+                  <a:srgbClr val="1F2937"/>
+                </a:solidFill>
+                <a:latin typeface="Arial"/>
+              </a:rPr>
+              <a:t>система</a:t>
+            </a:r>
+            <a:r>
+              <a:rPr sz="1750" dirty="0">
+                <a:solidFill>
+                  <a:srgbClr val="1F2937"/>
+                </a:solidFill>
+                <a:latin typeface="Arial"/>
+              </a:rPr>
+              <a:t> </a:t>
+            </a:r>
+            <a:r>
+              <a:rPr sz="1750" dirty="0" err="1">
+                <a:solidFill>
+                  <a:srgbClr val="1F2937"/>
+                </a:solidFill>
+                <a:latin typeface="Arial"/>
+              </a:rPr>
+              <a:t>проверки</a:t>
+            </a:r>
+            <a:r>
+              <a:rPr sz="1750" dirty="0">
+                <a:solidFill>
+                  <a:srgbClr val="1F2937"/>
+                </a:solidFill>
+                <a:latin typeface="Arial"/>
+              </a:rPr>
+              <a:t> </a:t>
+            </a:r>
+            <a:r>
+              <a:rPr sz="1750" dirty="0" err="1">
+                <a:solidFill>
+                  <a:srgbClr val="1F2937"/>
+                </a:solidFill>
+                <a:latin typeface="Arial"/>
+              </a:rPr>
+              <a:t>текстов</a:t>
+            </a:r>
+            <a:r>
+              <a:rPr sz="1750" dirty="0">
+                <a:solidFill>
+                  <a:srgbClr val="1F2937"/>
+                </a:solidFill>
+                <a:latin typeface="Arial"/>
+              </a:rPr>
+              <a:t> </a:t>
+            </a:r>
+            <a:r>
+              <a:rPr sz="1750" dirty="0" err="1">
+                <a:solidFill>
+                  <a:srgbClr val="1F2937"/>
+                </a:solidFill>
+                <a:latin typeface="Arial"/>
+              </a:rPr>
+              <a:t>на</a:t>
+            </a:r>
+            <a:r>
+              <a:rPr sz="1750" dirty="0">
+                <a:solidFill>
+                  <a:srgbClr val="1F2937"/>
+                </a:solidFill>
+                <a:latin typeface="Arial"/>
+              </a:rPr>
+              <a:t> </a:t>
+            </a:r>
+            <a:r>
+              <a:rPr sz="1750" dirty="0" err="1">
+                <a:solidFill>
+                  <a:srgbClr val="1F2937"/>
+                </a:solidFill>
+                <a:latin typeface="Arial"/>
+              </a:rPr>
+              <a:t>заимствования</a:t>
+            </a:r>
+            <a:endParaRPr sz="1750" dirty="0">
+              <a:solidFill>
+                <a:srgbClr val="1F2937"/>
+              </a:solidFill>
+              <a:latin typeface="Arial"/>
+            </a:endParaRPr>
+          </a:p>
+          <a:p>
+            <a:pPr>
+              <a:spcAft>
+                <a:spcPts val="800"/>
+              </a:spcAft>
+            </a:pPr>
+            <a:r>
+              <a:rPr sz="1750" dirty="0">
+                <a:solidFill>
+                  <a:srgbClr val="1F2937"/>
+                </a:solidFill>
+                <a:latin typeface="Arial"/>
+              </a:rPr>
+              <a:t>• </a:t>
+            </a:r>
+            <a:r>
+              <a:rPr sz="1750" dirty="0" err="1">
+                <a:solidFill>
+                  <a:srgbClr val="1F2937"/>
+                </a:solidFill>
+                <a:latin typeface="Arial"/>
+              </a:rPr>
+              <a:t>добавлены</a:t>
+            </a:r>
+            <a:r>
+              <a:rPr sz="1750" dirty="0">
+                <a:solidFill>
+                  <a:srgbClr val="1F2937"/>
+                </a:solidFill>
+                <a:latin typeface="Arial"/>
+              </a:rPr>
+              <a:t> </a:t>
+            </a:r>
+            <a:r>
+              <a:rPr sz="1750">
+                <a:solidFill>
+                  <a:srgbClr val="1F2937"/>
+                </a:solidFill>
+                <a:latin typeface="Arial"/>
+              </a:rPr>
+              <a:t>загрузка</a:t>
+            </a:r>
+            <a:r>
+              <a:rPr sz="1750" dirty="0">
+                <a:solidFill>
+                  <a:srgbClr val="1F2937"/>
+                </a:solidFill>
+                <a:latin typeface="Arial"/>
+              </a:rPr>
+              <a:t> </a:t>
+            </a:r>
+            <a:r>
+              <a:rPr sz="1750" dirty="0" err="1">
+                <a:solidFill>
+                  <a:srgbClr val="1F2937"/>
+                </a:solidFill>
+                <a:latin typeface="Arial"/>
+              </a:rPr>
+              <a:t>документов</a:t>
+            </a:r>
+            <a:r>
+              <a:rPr sz="1750" dirty="0">
+                <a:solidFill>
+                  <a:srgbClr val="1F2937"/>
+                </a:solidFill>
+                <a:latin typeface="Arial"/>
+              </a:rPr>
+              <a:t>, </a:t>
+            </a:r>
+            <a:r>
+              <a:rPr sz="1750" dirty="0" err="1">
+                <a:solidFill>
+                  <a:srgbClr val="1F2937"/>
+                </a:solidFill>
+                <a:latin typeface="Arial"/>
+              </a:rPr>
+              <a:t>правила</a:t>
+            </a:r>
+            <a:r>
+              <a:rPr sz="1750" dirty="0">
+                <a:solidFill>
+                  <a:srgbClr val="1F2937"/>
+                </a:solidFill>
+                <a:latin typeface="Arial"/>
+              </a:rPr>
+              <a:t> </a:t>
+            </a:r>
+            <a:r>
+              <a:rPr sz="1750" dirty="0" err="1">
+                <a:solidFill>
+                  <a:srgbClr val="1F2937"/>
+                </a:solidFill>
+                <a:latin typeface="Arial"/>
+              </a:rPr>
+              <a:t>исключений</a:t>
+            </a:r>
+            <a:r>
+              <a:rPr sz="1750" dirty="0">
+                <a:solidFill>
+                  <a:srgbClr val="1F2937"/>
+                </a:solidFill>
+                <a:latin typeface="Arial"/>
+              </a:rPr>
+              <a:t>, </a:t>
+            </a:r>
+            <a:r>
+              <a:rPr sz="1750" dirty="0" err="1">
+                <a:solidFill>
+                  <a:srgbClr val="1F2937"/>
+                </a:solidFill>
+                <a:latin typeface="Arial"/>
+              </a:rPr>
+              <a:t>отчёты</a:t>
+            </a:r>
+            <a:r>
+              <a:rPr sz="1750" dirty="0">
+                <a:solidFill>
+                  <a:srgbClr val="1F2937"/>
+                </a:solidFill>
+                <a:latin typeface="Arial"/>
+              </a:rPr>
+              <a:t> и </a:t>
+            </a:r>
+            <a:r>
+              <a:rPr sz="1750" dirty="0" err="1">
+                <a:solidFill>
+                  <a:srgbClr val="1F2937"/>
+                </a:solidFill>
+                <a:latin typeface="Arial"/>
+              </a:rPr>
+              <a:t>подсветка</a:t>
+            </a:r>
+            <a:r>
+              <a:rPr sz="1750" dirty="0">
+                <a:solidFill>
+                  <a:srgbClr val="1F2937"/>
+                </a:solidFill>
+                <a:latin typeface="Arial"/>
+              </a:rPr>
+              <a:t> </a:t>
+            </a:r>
+            <a:r>
+              <a:rPr sz="1750" dirty="0" err="1">
+                <a:solidFill>
+                  <a:srgbClr val="1F2937"/>
+                </a:solidFill>
+                <a:latin typeface="Arial"/>
+              </a:rPr>
+              <a:t>совпадений</a:t>
+            </a:r>
+            <a:endParaRPr sz="1750" dirty="0">
+              <a:solidFill>
+                <a:srgbClr val="1F2937"/>
+              </a:solidFill>
+              <a:latin typeface="Arial"/>
+            </a:endParaRPr>
+          </a:p>
+          <a:p>
+            <a:pPr>
+              <a:spcAft>
+                <a:spcPts val="800"/>
+              </a:spcAft>
+            </a:pPr>
+            <a:r>
+              <a:rPr sz="1750" dirty="0">
+                <a:solidFill>
+                  <a:srgbClr val="1F2937"/>
+                </a:solidFill>
+                <a:latin typeface="Arial"/>
+              </a:rPr>
+              <a:t>• </a:t>
+            </a:r>
+            <a:r>
+              <a:rPr sz="1750" dirty="0" err="1">
+                <a:solidFill>
+                  <a:srgbClr val="1F2937"/>
+                </a:solidFill>
+                <a:latin typeface="Arial"/>
+              </a:rPr>
+              <a:t>применён</a:t>
+            </a:r>
+            <a:r>
+              <a:rPr sz="1750" dirty="0">
+                <a:solidFill>
+                  <a:srgbClr val="1F2937"/>
+                </a:solidFill>
+                <a:latin typeface="Arial"/>
+              </a:rPr>
+              <a:t> </a:t>
+            </a:r>
+            <a:r>
+              <a:rPr sz="1750" dirty="0" err="1">
+                <a:solidFill>
+                  <a:srgbClr val="1F2937"/>
+                </a:solidFill>
+                <a:latin typeface="Arial"/>
+              </a:rPr>
+              <a:t>понятный</a:t>
+            </a:r>
+            <a:r>
+              <a:rPr sz="1750" dirty="0">
+                <a:solidFill>
+                  <a:srgbClr val="1F2937"/>
+                </a:solidFill>
+                <a:latin typeface="Arial"/>
+              </a:rPr>
+              <a:t> </a:t>
+            </a:r>
+            <a:r>
+              <a:rPr sz="1750" dirty="0" err="1">
+                <a:solidFill>
+                  <a:srgbClr val="1F2937"/>
+                </a:solidFill>
+                <a:latin typeface="Arial"/>
+              </a:rPr>
+              <a:t>метод</a:t>
+            </a:r>
+            <a:r>
+              <a:rPr sz="1750" dirty="0">
+                <a:solidFill>
+                  <a:srgbClr val="1F2937"/>
+                </a:solidFill>
+                <a:latin typeface="Arial"/>
+              </a:rPr>
+              <a:t> </a:t>
+            </a:r>
+            <a:r>
+              <a:rPr sz="1750" dirty="0" err="1">
+                <a:solidFill>
+                  <a:srgbClr val="1F2937"/>
+                </a:solidFill>
+                <a:latin typeface="Arial"/>
+              </a:rPr>
+              <a:t>сравнения</a:t>
+            </a:r>
+            <a:r>
+              <a:rPr sz="1750" dirty="0">
+                <a:solidFill>
+                  <a:srgbClr val="1F2937"/>
+                </a:solidFill>
+                <a:latin typeface="Arial"/>
+              </a:rPr>
+              <a:t> </a:t>
+            </a:r>
+            <a:r>
+              <a:rPr sz="1750" dirty="0" err="1">
+                <a:solidFill>
+                  <a:srgbClr val="1F2937"/>
+                </a:solidFill>
+                <a:latin typeface="Arial"/>
+              </a:rPr>
+              <a:t>на</a:t>
+            </a:r>
+            <a:r>
+              <a:rPr sz="1750" dirty="0">
+                <a:solidFill>
+                  <a:srgbClr val="1F2937"/>
+                </a:solidFill>
+                <a:latin typeface="Arial"/>
+              </a:rPr>
+              <a:t> </a:t>
+            </a:r>
+            <a:r>
+              <a:rPr sz="1750" dirty="0" err="1">
+                <a:solidFill>
+                  <a:srgbClr val="1F2937"/>
+                </a:solidFill>
+                <a:latin typeface="Arial"/>
+              </a:rPr>
+              <a:t>основе</a:t>
+            </a:r>
+            <a:r>
+              <a:rPr sz="1750" dirty="0">
+                <a:solidFill>
+                  <a:srgbClr val="1F2937"/>
+                </a:solidFill>
+                <a:latin typeface="Arial"/>
+              </a:rPr>
+              <a:t> </a:t>
+            </a:r>
+            <a:r>
+              <a:rPr sz="1750" dirty="0" err="1">
+                <a:solidFill>
+                  <a:srgbClr val="1F2937"/>
+                </a:solidFill>
+                <a:latin typeface="Arial"/>
+              </a:rPr>
+              <a:t>триграмм</a:t>
+            </a:r>
+            <a:r>
+              <a:rPr sz="1750" dirty="0">
+                <a:solidFill>
+                  <a:srgbClr val="1F2937"/>
+                </a:solidFill>
+                <a:latin typeface="Arial"/>
+              </a:rPr>
+              <a:t> и </a:t>
+            </a:r>
+            <a:r>
+              <a:rPr sz="1750" dirty="0" err="1">
+                <a:solidFill>
+                  <a:srgbClr val="1F2937"/>
+                </a:solidFill>
+                <a:latin typeface="Arial"/>
+              </a:rPr>
+              <a:t>хешей</a:t>
+            </a:r>
+            <a:endParaRPr sz="1750" dirty="0">
+              <a:solidFill>
+                <a:srgbClr val="1F2937"/>
+              </a:solidFill>
+              <a:latin typeface="Arial"/>
+            </a:endParaRPr>
+          </a:p>
+          <a:p>
+            <a:pPr>
+              <a:spcAft>
+                <a:spcPts val="800"/>
+              </a:spcAft>
+            </a:pPr>
+            <a:r>
+              <a:rPr sz="1750" dirty="0">
+                <a:solidFill>
+                  <a:srgbClr val="1F2937"/>
+                </a:solidFill>
+                <a:latin typeface="Arial"/>
+              </a:rPr>
+              <a:t>• </a:t>
+            </a:r>
+            <a:r>
+              <a:rPr sz="1750" dirty="0" err="1">
+                <a:solidFill>
+                  <a:srgbClr val="1F2937"/>
+                </a:solidFill>
+                <a:latin typeface="Arial"/>
+              </a:rPr>
+              <a:t>база</a:t>
+            </a:r>
+            <a:r>
+              <a:rPr sz="1750" dirty="0">
+                <a:solidFill>
+                  <a:srgbClr val="1F2937"/>
+                </a:solidFill>
+                <a:latin typeface="Arial"/>
+              </a:rPr>
+              <a:t> </a:t>
+            </a:r>
+            <a:r>
+              <a:rPr sz="1750" dirty="0" err="1">
+                <a:solidFill>
+                  <a:srgbClr val="1F2937"/>
+                </a:solidFill>
+                <a:latin typeface="Arial"/>
+              </a:rPr>
+              <a:t>данных</a:t>
+            </a:r>
+            <a:r>
+              <a:rPr sz="1750" dirty="0">
+                <a:solidFill>
+                  <a:srgbClr val="1F2937"/>
+                </a:solidFill>
+                <a:latin typeface="Arial"/>
+              </a:rPr>
+              <a:t> </a:t>
+            </a:r>
+            <a:r>
+              <a:rPr sz="1750" dirty="0" err="1">
+                <a:solidFill>
+                  <a:srgbClr val="1F2937"/>
+                </a:solidFill>
+                <a:latin typeface="Arial"/>
+              </a:rPr>
+              <a:t>хранит</a:t>
+            </a:r>
+            <a:r>
+              <a:rPr sz="1750" dirty="0">
+                <a:solidFill>
+                  <a:srgbClr val="1F2937"/>
+                </a:solidFill>
+                <a:latin typeface="Arial"/>
+              </a:rPr>
+              <a:t> </a:t>
+            </a:r>
+            <a:r>
+              <a:rPr sz="1750" dirty="0" err="1">
+                <a:solidFill>
+                  <a:srgbClr val="1F2937"/>
+                </a:solidFill>
+                <a:latin typeface="Arial"/>
+              </a:rPr>
+              <a:t>документы</a:t>
+            </a:r>
+            <a:r>
+              <a:rPr sz="1750" dirty="0">
+                <a:solidFill>
+                  <a:srgbClr val="1F2937"/>
+                </a:solidFill>
+                <a:latin typeface="Arial"/>
+              </a:rPr>
+              <a:t>, </a:t>
+            </a:r>
+            <a:r>
+              <a:rPr sz="1750" dirty="0" err="1">
+                <a:solidFill>
+                  <a:srgbClr val="1F2937"/>
+                </a:solidFill>
+                <a:latin typeface="Arial"/>
+              </a:rPr>
+              <a:t>результаты</a:t>
+            </a:r>
+            <a:r>
+              <a:rPr sz="1750" dirty="0">
+                <a:solidFill>
+                  <a:srgbClr val="1F2937"/>
+                </a:solidFill>
+                <a:latin typeface="Arial"/>
+              </a:rPr>
+              <a:t> и </a:t>
+            </a:r>
+            <a:r>
+              <a:rPr sz="1750" dirty="0" err="1">
+                <a:solidFill>
+                  <a:srgbClr val="1F2937"/>
+                </a:solidFill>
+                <a:latin typeface="Arial"/>
+              </a:rPr>
+              <a:t>готовые</a:t>
+            </a:r>
+            <a:r>
+              <a:rPr sz="1750" dirty="0">
+                <a:solidFill>
+                  <a:srgbClr val="1F2937"/>
+                </a:solidFill>
+                <a:latin typeface="Arial"/>
+              </a:rPr>
+              <a:t> </a:t>
+            </a:r>
+            <a:r>
+              <a:rPr sz="1750" dirty="0" err="1">
+                <a:solidFill>
+                  <a:srgbClr val="1F2937"/>
+                </a:solidFill>
+                <a:latin typeface="Arial"/>
+              </a:rPr>
+              <a:t>индексы</a:t>
+            </a:r>
+            <a:r>
+              <a:rPr sz="1750" dirty="0">
+                <a:solidFill>
+                  <a:srgbClr val="1F2937"/>
+                </a:solidFill>
+                <a:latin typeface="Arial"/>
+              </a:rPr>
+              <a:t> </a:t>
+            </a:r>
+            <a:r>
+              <a:rPr sz="1750" dirty="0" err="1">
+                <a:solidFill>
+                  <a:srgbClr val="1F2937"/>
+                </a:solidFill>
+                <a:latin typeface="Arial"/>
+              </a:rPr>
+              <a:t>для</a:t>
+            </a:r>
+            <a:r>
+              <a:rPr sz="1750" dirty="0">
+                <a:solidFill>
+                  <a:srgbClr val="1F2937"/>
+                </a:solidFill>
+                <a:latin typeface="Arial"/>
+              </a:rPr>
+              <a:t> </a:t>
+            </a:r>
+            <a:r>
+              <a:rPr sz="1750" dirty="0" err="1">
+                <a:solidFill>
+                  <a:srgbClr val="1F2937"/>
+                </a:solidFill>
+                <a:latin typeface="Arial"/>
+              </a:rPr>
+              <a:t>повторного</a:t>
+            </a:r>
+            <a:r>
+              <a:rPr sz="1750" dirty="0">
+                <a:solidFill>
+                  <a:srgbClr val="1F2937"/>
+                </a:solidFill>
+                <a:latin typeface="Arial"/>
+              </a:rPr>
+              <a:t> </a:t>
+            </a:r>
+            <a:r>
+              <a:rPr sz="1750" dirty="0" err="1">
+                <a:solidFill>
+                  <a:srgbClr val="1F2937"/>
+                </a:solidFill>
+                <a:latin typeface="Arial"/>
+              </a:rPr>
+              <a:t>анализа</a:t>
+            </a:r>
+            <a:endParaRPr sz="1750" dirty="0">
+              <a:solidFill>
+                <a:srgbClr val="1F2937"/>
+              </a:solidFill>
+              <a:latin typeface="Arial"/>
+            </a:endParaRPr>
+          </a:p>
+        </p:txBody>
+      </p:sp>
+      <p:sp>
+        <p:nvSpPr>
+          <p:cNvPr id="8" name="Rounded Rectangle 7"/>
           <p:cNvSpPr/>
           <p:nvPr/>
         </p:nvSpPr>
         <p:spPr>
           <a:xfrm>
-            <a:off x="777240" y="1325880"/>
-            <a:ext cx="5303520" cy="4114800"/>
+            <a:off x="7818120" y="1417320"/>
+            <a:ext cx="3337560" cy="2926080"/>
           </a:xfrm>
           <a:prstGeom prst="roundRect">
             <a:avLst/>
@@ -5158,14 +5520,14 @@
       </p:sp>
       <p:sp>
         <p:nvSpPr>
-          <p:cNvPr id="8" name="TextBox 7"/>
+          <p:cNvPr id="9" name="TextBox 8"/>
           <p:cNvSpPr txBox="1"/>
           <p:nvPr/>
         </p:nvSpPr>
         <p:spPr>
           <a:xfrm>
-            <a:off x="1097280" y="1627632"/>
-            <a:ext cx="4663440" cy="320040"/>
+            <a:off x="8138160" y="1828800"/>
+            <a:ext cx="2697480" cy="457200"/>
           </a:xfrm>
           <a:prstGeom prst="rect">
             <a:avLst/>
@@ -5180,27 +5542,27 @@
           <a:p>
             <a:pPr algn="ctr"/>
             <a:r>
-              <a:rPr sz="2000" b="1">
+              <a:rPr sz="2400" b="1">
                 <a:solidFill>
                   <a:srgbClr val="0F766E"/>
                 </a:solidFill>
                 <a:latin typeface="Arial"/>
               </a:rPr>
-              <a:t>Проверенные сценарии</a:t>
-            </a:r>
-          </a:p>
-        </p:txBody>
-      </p:sp>
-      <p:sp>
-        <p:nvSpPr>
-          <p:cNvPr id="9" name="TextBox 8"/>
+              <a:t>Результат</a:t>
+            </a:r>
+          </a:p>
+        </p:txBody>
+      </p:sp>
+      <p:sp>
+        <p:nvSpPr>
+          <p:cNvPr id="10" name="TextBox 9"/>
           <p:cNvSpPr txBox="1"/>
           <p:nvPr/>
         </p:nvSpPr>
         <p:spPr>
           <a:xfrm>
-            <a:off x="1097280" y="2148840"/>
-            <a:ext cx="4617720" cy="2560320"/>
+            <a:off x="8138160" y="2560320"/>
+            <a:ext cx="2697480" cy="822960"/>
           </a:xfrm>
           <a:prstGeom prst="rect">
             <a:avLst/>
@@ -5213,97 +5575,29 @@
           </a:bodyPr>
           <a:lstStyle/>
           <a:p>
-            <a:pPr>
-              <a:spcAft>
-                <a:spcPts val="400"/>
-              </a:spcAft>
-            </a:pPr>
-            <a:r>
-              <a:rPr sz="1500">
-                <a:solidFill>
-                  <a:srgbClr val="1F2937"/>
-                </a:solidFill>
-                <a:latin typeface="Arial"/>
-              </a:rPr>
-              <a:t>• создание пользователя и добавление документов</a:t>
-            </a:r>
-          </a:p>
-          <a:p>
-            <a:pPr>
-              <a:spcAft>
-                <a:spcPts val="400"/>
-              </a:spcAft>
-            </a:pPr>
-            <a:r>
-              <a:rPr sz="1500">
-                <a:solidFill>
-                  <a:srgbClr val="1F2937"/>
-                </a:solidFill>
-                <a:latin typeface="Arial"/>
-              </a:rPr>
-              <a:t>• проверка текста с найденными совпадениями</a:t>
-            </a:r>
-          </a:p>
-          <a:p>
-            <a:pPr>
-              <a:spcAft>
-                <a:spcPts val="400"/>
-              </a:spcAft>
-            </a:pPr>
-            <a:r>
-              <a:rPr sz="1500">
-                <a:solidFill>
-                  <a:srgbClr val="1F2937"/>
-                </a:solidFill>
-                <a:latin typeface="Arial"/>
-              </a:rPr>
-              <a:t>• применение правил исключений</a:t>
-            </a:r>
-          </a:p>
-          <a:p>
-            <a:pPr>
-              <a:spcAft>
-                <a:spcPts val="400"/>
-              </a:spcAft>
-            </a:pPr>
-            <a:r>
-              <a:rPr sz="1500">
-                <a:solidFill>
-                  <a:srgbClr val="1F2937"/>
-                </a:solidFill>
-                <a:latin typeface="Arial"/>
-              </a:rPr>
-              <a:t>• формирование архива уникальных работ</a:t>
-            </a:r>
-          </a:p>
-          <a:p>
-            <a:pPr>
-              <a:spcAft>
-                <a:spcPts val="400"/>
-              </a:spcAft>
-            </a:pPr>
-            <a:r>
-              <a:rPr sz="1500">
-                <a:solidFill>
-                  <a:srgbClr val="1F2937"/>
-                </a:solidFill>
-                <a:latin typeface="Arial"/>
-              </a:rPr>
-              <a:t>• корректная ошибка для PDF без текстового слоя</a:t>
-            </a:r>
-          </a:p>
-        </p:txBody>
-      </p:sp>
-      <p:sp>
-        <p:nvSpPr>
-          <p:cNvPr id="10" name="Rounded Rectangle 9"/>
+            <a:pPr algn="ctr"/>
+            <a:r>
+              <a:rPr sz="1800" b="1">
+                <a:solidFill>
+                  <a:srgbClr val="1F2937"/>
+                </a:solidFill>
+                <a:latin typeface="Arial"/>
+              </a:rPr>
+              <a:t>готовый локальный прототип для первичной проверки оригинальности</a:t>
+            </a:r>
+          </a:p>
+        </p:txBody>
+      </p:sp>
+      <p:sp>
+        <p:nvSpPr>
+          <p:cNvPr id="11" name="Rounded Rectangle 10"/>
           <p:cNvSpPr/>
           <p:nvPr/>
         </p:nvSpPr>
         <p:spPr>
           <a:xfrm>
-            <a:off x="6537960" y="1325880"/>
-            <a:ext cx="4572000" cy="4114800"/>
+            <a:off x="868680" y="4892040"/>
+            <a:ext cx="10378440" cy="685800"/>
           </a:xfrm>
           <a:prstGeom prst="roundRect">
             <a:avLst/>
@@ -5342,14 +5636,14 @@
       </p:sp>
       <p:sp>
         <p:nvSpPr>
-          <p:cNvPr id="11" name="TextBox 10"/>
+          <p:cNvPr id="12" name="TextBox 11"/>
           <p:cNvSpPr txBox="1"/>
           <p:nvPr/>
         </p:nvSpPr>
         <p:spPr>
           <a:xfrm>
-            <a:off x="6812280" y="1627632"/>
-            <a:ext cx="4023360" cy="320040"/>
+            <a:off x="1097280" y="5074920"/>
+            <a:ext cx="9921240" cy="292608"/>
           </a:xfrm>
           <a:prstGeom prst="rect">
             <a:avLst/>
@@ -5364,623 +5658,202 @@
           <a:p>
             <a:pPr algn="ctr"/>
             <a:r>
-              <a:rPr sz="2000" b="1">
+              <a:rPr sz="1550" b="0" dirty="0" err="1">
                 <a:solidFill>
                   <a:srgbClr val="B45309"/>
                 </a:solidFill>
                 <a:latin typeface="Arial"/>
               </a:rPr>
-              <a:t>Ограничения версии</a:t>
-            </a:r>
-          </a:p>
-        </p:txBody>
-      </p:sp>
-      <p:sp>
-        <p:nvSpPr>
-          <p:cNvPr id="12" name="TextBox 11"/>
-          <p:cNvSpPr txBox="1"/>
-          <p:nvPr/>
-        </p:nvSpPr>
-        <p:spPr>
-          <a:xfrm>
-            <a:off x="6812280" y="2240280"/>
-            <a:ext cx="3977639" cy="1463040"/>
-          </a:xfrm>
-          <a:prstGeom prst="rect">
-            <a:avLst/>
-          </a:prstGeom>
-          <a:noFill/>
-        </p:spPr>
-        <p:txBody>
-          <a:bodyPr wrap="square">
-            <a:spAutoFit/>
-          </a:bodyPr>
-          <a:lstStyle/>
-          <a:p>
-            <a:pPr>
-              <a:spcAft>
-                <a:spcPts val="800"/>
-              </a:spcAft>
-            </a:pPr>
-            <a:r>
-              <a:rPr sz="1600">
-                <a:solidFill>
-                  <a:srgbClr val="1F2937"/>
-                </a:solidFill>
-                <a:latin typeface="Arial"/>
-              </a:rPr>
-              <a:t>• сканированные PDF пока не распознаются</a:t>
-            </a:r>
-          </a:p>
-          <a:p>
-            <a:pPr>
-              <a:spcAft>
-                <a:spcPts val="800"/>
-              </a:spcAft>
-            </a:pPr>
-            <a:r>
-              <a:rPr sz="1600">
-                <a:solidFill>
-                  <a:srgbClr val="1F2937"/>
-                </a:solidFill>
-                <a:latin typeface="Arial"/>
-              </a:rPr>
-              <a:t>• глубокое перефразирование требует более сложного семантического анализа</a:t>
-            </a:r>
-          </a:p>
-        </p:txBody>
-      </p:sp>
-      <p:sp>
-        <p:nvSpPr>
-          <p:cNvPr id="13" name="TextBox 12"/>
-          <p:cNvSpPr txBox="1"/>
-          <p:nvPr/>
-        </p:nvSpPr>
-        <p:spPr>
-          <a:xfrm>
-            <a:off x="6812280" y="4069080"/>
-            <a:ext cx="3931920" cy="502920"/>
-          </a:xfrm>
-          <a:prstGeom prst="rect">
-            <a:avLst/>
-          </a:prstGeom>
-          <a:noFill/>
-        </p:spPr>
-        <p:txBody>
-          <a:bodyPr wrap="square">
-            <a:spAutoFit/>
-          </a:bodyPr>
-          <a:lstStyle/>
-          <a:p>
-            <a:pPr algn="ctr"/>
-            <a:r>
-              <a:rPr sz="1500" b="0">
-                <a:solidFill>
-                  <a:srgbClr val="5B626E"/>
-                </a:solidFill>
-                <a:latin typeface="Arial"/>
-              </a:rPr>
-              <a:t>Ограничения зафиксированы и могут быть закрыты в следующих версиях.</a:t>
-            </a:r>
-          </a:p>
-        </p:txBody>
-      </p:sp>
-    </p:spTree>
-  </p:cSld>
-  <p:clrMapOvr>
-    <a:masterClrMapping/>
-  </p:clrMapOvr>
-</p:sld>
-</file>
-
-<file path=ppt/slides/slide13.xml><?xml version="1.0" encoding="utf-8"?>
-<p:sld xmlns:a="http://schemas.openxmlformats.org/drawingml/2006/main" xmlns:r="http://schemas.openxmlformats.org/officeDocument/2006/relationships" xmlns:p="http://schemas.openxmlformats.org/presentationml/2006/main">
-  <p:cSld>
-    <p:bg>
-      <p:bgPr>
-        <a:solidFill>
-          <a:srgbClr val="F8F6F0"/>
-        </a:solidFill>
-        <a:effectLst/>
-      </p:bgPr>
-    </p:bg>
-    <p:spTree>
-      <p:nvGrpSpPr>
-        <p:cNvPr id="1" name=""/>
-        <p:cNvGrpSpPr/>
-        <p:nvPr/>
-      </p:nvGrpSpPr>
-      <p:grpSpPr>
-        <a:xfrm>
-          <a:off x="0" y="0"/>
-          <a:ext cx="0" cy="0"/>
-          <a:chOff x="0" y="0"/>
-          <a:chExt cx="0" cy="0"/>
-        </a:xfrm>
-      </p:grpSpPr>
-      <p:sp>
-        <p:nvSpPr>
-          <p:cNvPr id="2" name="Oval 1"/>
-          <p:cNvSpPr/>
-          <p:nvPr/>
-        </p:nvSpPr>
-        <p:spPr>
-          <a:xfrm>
-            <a:off x="10469880" y="-228600"/>
-            <a:ext cx="1645920" cy="1645920"/>
-          </a:xfrm>
-          <a:prstGeom prst="ellipse">
-            <a:avLst/>
-          </a:prstGeom>
-          <a:solidFill>
-            <a:srgbClr val="E8F4F0"/>
-          </a:solidFill>
-          <a:ln>
-            <a:noFill/>
-          </a:ln>
-        </p:spPr>
-        <p:style>
-          <a:lnRef idx="1">
-            <a:schemeClr val="accent1"/>
-          </a:lnRef>
-          <a:fillRef idx="3">
-            <a:schemeClr val="accent1"/>
-          </a:fillRef>
-          <a:effectRef idx="2">
-            <a:schemeClr val="accent1"/>
-          </a:effectRef>
-          <a:fontRef idx="minor">
-            <a:schemeClr val="lt1"/>
-          </a:fontRef>
-        </p:style>
-        <p:txBody>
-          <a:bodyPr rtlCol="0" anchor="ctr"/>
-          <a:lstStyle/>
-          <a:p>
-            <a:pPr algn="ctr"/>
-            <a:endParaRPr/>
-          </a:p>
-        </p:txBody>
-      </p:sp>
-      <p:sp>
-        <p:nvSpPr>
-          <p:cNvPr id="3" name="Oval 2"/>
-          <p:cNvSpPr/>
-          <p:nvPr/>
-        </p:nvSpPr>
-        <p:spPr>
-          <a:xfrm>
-            <a:off x="-320040" y="5669280"/>
-            <a:ext cx="1463040" cy="1463040"/>
-          </a:xfrm>
-          <a:prstGeom prst="ellipse">
-            <a:avLst/>
-          </a:prstGeom>
-          <a:solidFill>
-            <a:srgbClr val="F2E5CB"/>
-          </a:solidFill>
-          <a:ln>
-            <a:noFill/>
-          </a:ln>
-        </p:spPr>
-        <p:style>
-          <a:lnRef idx="1">
-            <a:schemeClr val="accent1"/>
-          </a:lnRef>
-          <a:fillRef idx="3">
-            <a:schemeClr val="accent1"/>
-          </a:fillRef>
-          <a:effectRef idx="2">
-            <a:schemeClr val="accent1"/>
-          </a:effectRef>
-          <a:fontRef idx="minor">
-            <a:schemeClr val="lt1"/>
-          </a:fontRef>
-        </p:style>
-        <p:txBody>
-          <a:bodyPr rtlCol="0" anchor="ctr"/>
-          <a:lstStyle/>
-          <a:p>
-            <a:pPr algn="ctr"/>
-            <a:endParaRPr/>
-          </a:p>
-        </p:txBody>
-      </p:sp>
-      <p:sp>
-        <p:nvSpPr>
-          <p:cNvPr id="4" name="TextBox 3"/>
-          <p:cNvSpPr txBox="1"/>
-          <p:nvPr/>
-        </p:nvSpPr>
-        <p:spPr>
-          <a:xfrm>
-            <a:off x="411480" y="384048"/>
-            <a:ext cx="9875520" cy="502920"/>
-          </a:xfrm>
-          <a:prstGeom prst="rect">
-            <a:avLst/>
-          </a:prstGeom>
-          <a:noFill/>
-        </p:spPr>
-        <p:txBody>
-          <a:bodyPr wrap="square">
-            <a:spAutoFit/>
-          </a:bodyPr>
-          <a:lstStyle/>
-          <a:p>
-            <a:r>
-              <a:rPr sz="2500" b="1">
-                <a:solidFill>
-                  <a:srgbClr val="1F2937"/>
-                </a:solidFill>
-                <a:latin typeface="Arial"/>
-              </a:rPr>
-              <a:t>Заключение</a:t>
-            </a:r>
-          </a:p>
-        </p:txBody>
-      </p:sp>
-      <p:sp>
-        <p:nvSpPr>
-          <p:cNvPr id="5" name="Rectangle 4"/>
-          <p:cNvSpPr/>
-          <p:nvPr/>
-        </p:nvSpPr>
-        <p:spPr>
-          <a:xfrm>
-            <a:off x="411480" y="960120"/>
-            <a:ext cx="1920240" cy="45720"/>
-          </a:xfrm>
-          <a:prstGeom prst="rect">
-            <a:avLst/>
-          </a:prstGeom>
-          <a:solidFill>
-            <a:srgbClr val="0F766E"/>
-          </a:solidFill>
-          <a:ln>
-            <a:solidFill>
-              <a:srgbClr val="0F766E"/>
-            </a:solidFill>
-          </a:ln>
-        </p:spPr>
-        <p:style>
-          <a:lnRef idx="1">
-            <a:schemeClr val="accent1"/>
-          </a:lnRef>
-          <a:fillRef idx="3">
-            <a:schemeClr val="accent1"/>
-          </a:fillRef>
-          <a:effectRef idx="2">
-            <a:schemeClr val="accent1"/>
-          </a:effectRef>
-          <a:fontRef idx="minor">
-            <a:schemeClr val="lt1"/>
-          </a:fontRef>
-        </p:style>
-        <p:txBody>
-          <a:bodyPr rtlCol="0" anchor="ctr"/>
-          <a:lstStyle/>
-          <a:p>
-            <a:pPr algn="ctr"/>
-            <a:endParaRPr/>
-          </a:p>
-        </p:txBody>
-      </p:sp>
-      <p:sp>
-        <p:nvSpPr>
-          <p:cNvPr id="6" name="TextBox 5"/>
-          <p:cNvSpPr txBox="1"/>
-          <p:nvPr/>
-        </p:nvSpPr>
-        <p:spPr>
-          <a:xfrm>
-            <a:off x="5440680" y="6473952"/>
-            <a:ext cx="1325880" cy="228600"/>
-          </a:xfrm>
-          <a:prstGeom prst="rect">
-            <a:avLst/>
-          </a:prstGeom>
-          <a:noFill/>
-        </p:spPr>
-        <p:txBody>
-          <a:bodyPr wrap="square">
-            <a:spAutoFit/>
-          </a:bodyPr>
-          <a:lstStyle/>
-          <a:p>
-            <a:pPr algn="ctr"/>
-            <a:r>
-              <a:rPr sz="1200" b="0">
-                <a:solidFill>
-                  <a:srgbClr val="5B626E"/>
-                </a:solidFill>
-                <a:latin typeface="Arial"/>
-              </a:rPr>
-              <a:t>12</a:t>
-            </a:r>
-          </a:p>
-        </p:txBody>
-      </p:sp>
-      <p:sp>
-        <p:nvSpPr>
-          <p:cNvPr id="7" name="TextBox 6"/>
-          <p:cNvSpPr txBox="1"/>
-          <p:nvPr/>
-        </p:nvSpPr>
-        <p:spPr>
-          <a:xfrm>
-            <a:off x="777240" y="1325880"/>
-            <a:ext cx="6583680" cy="2880360"/>
-          </a:xfrm>
-          <a:prstGeom prst="rect">
-            <a:avLst/>
-          </a:prstGeom>
-          <a:noFill/>
-        </p:spPr>
-        <p:txBody>
-          <a:bodyPr wrap="square">
-            <a:spAutoFit/>
-          </a:bodyPr>
-          <a:lstStyle/>
-          <a:p>
-            <a:pPr>
-              <a:spcAft>
-                <a:spcPts val="800"/>
-              </a:spcAft>
-            </a:pPr>
-            <a:r>
-              <a:rPr sz="1750">
-                <a:solidFill>
-                  <a:srgbClr val="1F2937"/>
-                </a:solidFill>
-                <a:latin typeface="Arial"/>
-              </a:rPr>
-              <a:t>• реализована локальная система проверки текстов на заимствования</a:t>
-            </a:r>
-          </a:p>
-          <a:p>
-            <a:pPr>
-              <a:spcAft>
-                <a:spcPts val="800"/>
-              </a:spcAft>
-            </a:pPr>
-            <a:r>
-              <a:rPr sz="1750">
-                <a:solidFill>
-                  <a:srgbClr val="1F2937"/>
-                </a:solidFill>
-                <a:latin typeface="Arial"/>
-              </a:rPr>
-              <a:t>• добавлены загрузка документов, правила исключений, отчёты и подсветка совпадений</a:t>
-            </a:r>
-          </a:p>
-          <a:p>
-            <a:pPr>
-              <a:spcAft>
-                <a:spcPts val="800"/>
-              </a:spcAft>
-            </a:pPr>
-            <a:r>
-              <a:rPr sz="1750">
-                <a:solidFill>
-                  <a:srgbClr val="1F2937"/>
-                </a:solidFill>
-                <a:latin typeface="Arial"/>
-              </a:rPr>
-              <a:t>• применён понятный метод сравнения на основе триграмм и хешей</a:t>
-            </a:r>
-          </a:p>
-          <a:p>
-            <a:pPr>
-              <a:spcAft>
-                <a:spcPts val="800"/>
-              </a:spcAft>
-            </a:pPr>
-            <a:r>
-              <a:rPr sz="1750">
-                <a:solidFill>
-                  <a:srgbClr val="1F2937"/>
-                </a:solidFill>
-                <a:latin typeface="Arial"/>
-              </a:rPr>
-              <a:t>• база данных хранит документы, результаты и готовые индексы для повторного анализа</a:t>
-            </a:r>
-          </a:p>
-        </p:txBody>
-      </p:sp>
-      <p:sp>
-        <p:nvSpPr>
-          <p:cNvPr id="8" name="Rounded Rectangle 7"/>
-          <p:cNvSpPr/>
-          <p:nvPr/>
-        </p:nvSpPr>
-        <p:spPr>
-          <a:xfrm>
-            <a:off x="7818120" y="1417320"/>
-            <a:ext cx="3337560" cy="2926080"/>
-          </a:xfrm>
-          <a:prstGeom prst="roundRect">
-            <a:avLst/>
-          </a:prstGeom>
-          <a:solidFill>
-            <a:srgbClr val="E8F4F0"/>
-          </a:solidFill>
-          <a:ln>
-            <a:solidFill>
-              <a:srgbClr val="DACFBD"/>
-            </a:solidFill>
-          </a:ln>
-        </p:spPr>
-        <p:style>
-          <a:lnRef idx="1">
-            <a:schemeClr val="accent1"/>
-          </a:lnRef>
-          <a:fillRef idx="3">
-            <a:schemeClr val="accent1"/>
-          </a:fillRef>
-          <a:effectRef idx="2">
-            <a:schemeClr val="accent1"/>
-          </a:effectRef>
-          <a:fontRef idx="minor">
-            <a:schemeClr val="lt1"/>
-          </a:fontRef>
-        </p:style>
-        <p:txBody>
-          <a:bodyPr rtlCol="0" anchor="ctr"/>
-          <a:lstStyle/>
-          <a:p>
-            <a:pPr algn="ctr"/>
-            <a:endParaRPr/>
-          </a:p>
-        </p:txBody>
-      </p:sp>
-      <p:sp>
-        <p:nvSpPr>
-          <p:cNvPr id="9" name="TextBox 8"/>
-          <p:cNvSpPr txBox="1"/>
-          <p:nvPr/>
-        </p:nvSpPr>
-        <p:spPr>
-          <a:xfrm>
-            <a:off x="8138160" y="1828800"/>
-            <a:ext cx="2697480" cy="457200"/>
-          </a:xfrm>
-          <a:prstGeom prst="rect">
-            <a:avLst/>
-          </a:prstGeom>
-          <a:noFill/>
-        </p:spPr>
-        <p:txBody>
-          <a:bodyPr wrap="square">
-            <a:spAutoFit/>
-          </a:bodyPr>
-          <a:lstStyle/>
-          <a:p>
-            <a:pPr algn="ctr"/>
-            <a:r>
-              <a:rPr sz="2400" b="1">
-                <a:solidFill>
-                  <a:srgbClr val="0F766E"/>
-                </a:solidFill>
-                <a:latin typeface="Arial"/>
-              </a:rPr>
-              <a:t>Результат</a:t>
-            </a:r>
-          </a:p>
-        </p:txBody>
-      </p:sp>
-      <p:sp>
-        <p:nvSpPr>
-          <p:cNvPr id="10" name="TextBox 9"/>
-          <p:cNvSpPr txBox="1"/>
-          <p:nvPr/>
-        </p:nvSpPr>
-        <p:spPr>
-          <a:xfrm>
-            <a:off x="8138160" y="2560320"/>
-            <a:ext cx="2697480" cy="822960"/>
-          </a:xfrm>
-          <a:prstGeom prst="rect">
-            <a:avLst/>
-          </a:prstGeom>
-          <a:noFill/>
-        </p:spPr>
-        <p:txBody>
-          <a:bodyPr wrap="square">
-            <a:spAutoFit/>
-          </a:bodyPr>
-          <a:lstStyle/>
-          <a:p>
-            <a:pPr algn="ctr"/>
-            <a:r>
-              <a:rPr sz="1800" b="1">
-                <a:solidFill>
-                  <a:srgbClr val="1F2937"/>
-                </a:solidFill>
-                <a:latin typeface="Arial"/>
-              </a:rPr>
-              <a:t>готовый локальный прототип для первичной проверки оригинальности</a:t>
-            </a:r>
-          </a:p>
-        </p:txBody>
-      </p:sp>
-      <p:sp>
-        <p:nvSpPr>
-          <p:cNvPr id="11" name="Rounded Rectangle 10"/>
-          <p:cNvSpPr/>
-          <p:nvPr/>
-        </p:nvSpPr>
-        <p:spPr>
-          <a:xfrm>
-            <a:off x="868680" y="4892040"/>
-            <a:ext cx="10378440" cy="685800"/>
-          </a:xfrm>
-          <a:prstGeom prst="roundRect">
-            <a:avLst/>
-          </a:prstGeom>
-          <a:solidFill>
-            <a:srgbClr val="FFFAF1"/>
-          </a:solidFill>
-          <a:ln>
-            <a:solidFill>
-              <a:srgbClr val="E8D1AE"/>
-            </a:solidFill>
-          </a:ln>
-        </p:spPr>
-        <p:style>
-          <a:lnRef idx="1">
-            <a:schemeClr val="accent1"/>
-          </a:lnRef>
-          <a:fillRef idx="3">
-            <a:schemeClr val="accent1"/>
-          </a:fillRef>
-          <a:effectRef idx="2">
-            <a:schemeClr val="accent1"/>
-          </a:effectRef>
-          <a:fontRef idx="minor">
-            <a:schemeClr val="lt1"/>
-          </a:fontRef>
-        </p:style>
-        <p:txBody>
-          <a:bodyPr rtlCol="0" anchor="ctr"/>
-          <a:lstStyle/>
-          <a:p>
-            <a:pPr algn="ctr"/>
-            <a:endParaRPr/>
-          </a:p>
-        </p:txBody>
-      </p:sp>
-      <p:sp>
-        <p:nvSpPr>
-          <p:cNvPr id="12" name="TextBox 11"/>
-          <p:cNvSpPr txBox="1"/>
-          <p:nvPr/>
-        </p:nvSpPr>
-        <p:spPr>
-          <a:xfrm>
-            <a:off x="1097280" y="5074920"/>
-            <a:ext cx="9921240" cy="292608"/>
-          </a:xfrm>
-          <a:prstGeom prst="rect">
-            <a:avLst/>
-          </a:prstGeom>
-          <a:noFill/>
-        </p:spPr>
-        <p:txBody>
-          <a:bodyPr wrap="square">
-            <a:spAutoFit/>
-          </a:bodyPr>
-          <a:lstStyle/>
-          <a:p>
-            <a:pPr algn="ctr"/>
-            <a:r>
-              <a:rPr sz="1550" b="0">
+              <a:t>Дальнейшее</a:t>
+            </a:r>
+            <a:r>
+              <a:rPr sz="1550" b="0" dirty="0">
                 <a:solidFill>
                   <a:srgbClr val="B45309"/>
                 </a:solidFill>
                 <a:latin typeface="Arial"/>
               </a:rPr>
-              <a:t>Дальнейшее развитие: распознавание сканов, более развитый интерфейс и семантическое сравнение перефразированных фрагментов.</a:t>
+              <a:t> </a:t>
+            </a:r>
+            <a:r>
+              <a:rPr sz="1550" b="0" dirty="0" err="1">
+                <a:solidFill>
+                  <a:srgbClr val="B45309"/>
+                </a:solidFill>
+                <a:latin typeface="Arial"/>
+              </a:rPr>
+              <a:t>развитие</a:t>
+            </a:r>
+            <a:r>
+              <a:rPr sz="1550" b="0" dirty="0">
+                <a:solidFill>
+                  <a:srgbClr val="B45309"/>
+                </a:solidFill>
+                <a:latin typeface="Arial"/>
+              </a:rPr>
+              <a:t>: </a:t>
+            </a:r>
+            <a:r>
+              <a:rPr sz="1550" b="0" dirty="0" err="1">
+                <a:solidFill>
+                  <a:srgbClr val="B45309"/>
+                </a:solidFill>
+                <a:latin typeface="Arial"/>
+              </a:rPr>
+              <a:t>распознавание</a:t>
+            </a:r>
+            <a:r>
+              <a:rPr sz="1550" b="0" dirty="0">
+                <a:solidFill>
+                  <a:srgbClr val="B45309"/>
+                </a:solidFill>
+                <a:latin typeface="Arial"/>
+              </a:rPr>
+              <a:t> </a:t>
+            </a:r>
+            <a:r>
+              <a:rPr sz="1550" b="0" dirty="0" err="1">
+                <a:solidFill>
+                  <a:srgbClr val="B45309"/>
+                </a:solidFill>
+                <a:latin typeface="Arial"/>
+              </a:rPr>
+              <a:t>сканов</a:t>
+            </a:r>
+            <a:r>
+              <a:rPr sz="1550" b="0" dirty="0">
+                <a:solidFill>
+                  <a:srgbClr val="B45309"/>
+                </a:solidFill>
+                <a:latin typeface="Arial"/>
+              </a:rPr>
+              <a:t>, </a:t>
+            </a:r>
+            <a:r>
+              <a:rPr sz="1550" b="0" dirty="0" err="1">
+                <a:solidFill>
+                  <a:srgbClr val="B45309"/>
+                </a:solidFill>
+                <a:latin typeface="Arial"/>
+              </a:rPr>
+              <a:t>более</a:t>
+            </a:r>
+            <a:r>
+              <a:rPr sz="1550" b="0" dirty="0">
+                <a:solidFill>
+                  <a:srgbClr val="B45309"/>
+                </a:solidFill>
+                <a:latin typeface="Arial"/>
+              </a:rPr>
+              <a:t> </a:t>
+            </a:r>
+            <a:r>
+              <a:rPr sz="1550" b="0" dirty="0" err="1">
+                <a:solidFill>
+                  <a:srgbClr val="B45309"/>
+                </a:solidFill>
+                <a:latin typeface="Arial"/>
+              </a:rPr>
+              <a:t>развитый</a:t>
+            </a:r>
+            <a:r>
+              <a:rPr sz="1550" b="0" dirty="0">
+                <a:solidFill>
+                  <a:srgbClr val="B45309"/>
+                </a:solidFill>
+                <a:latin typeface="Arial"/>
+              </a:rPr>
+              <a:t> </a:t>
+            </a:r>
+            <a:r>
+              <a:rPr sz="1550" b="0" dirty="0" err="1">
+                <a:solidFill>
+                  <a:srgbClr val="B45309"/>
+                </a:solidFill>
+                <a:latin typeface="Arial"/>
+              </a:rPr>
+              <a:t>интерфейс</a:t>
+            </a:r>
+            <a:r>
+              <a:rPr sz="1550" b="0" dirty="0">
+                <a:solidFill>
+                  <a:srgbClr val="B45309"/>
+                </a:solidFill>
+                <a:latin typeface="Arial"/>
+              </a:rPr>
+              <a:t> и </a:t>
+            </a:r>
+            <a:r>
+              <a:rPr sz="1550" b="0" dirty="0" err="1">
+                <a:solidFill>
+                  <a:srgbClr val="B45309"/>
+                </a:solidFill>
+                <a:latin typeface="Arial"/>
+              </a:rPr>
+              <a:t>семантическое</a:t>
+            </a:r>
+            <a:r>
+              <a:rPr sz="1550" b="0" dirty="0">
+                <a:solidFill>
+                  <a:srgbClr val="B45309"/>
+                </a:solidFill>
+                <a:latin typeface="Arial"/>
+              </a:rPr>
+              <a:t> </a:t>
+            </a:r>
+            <a:r>
+              <a:rPr sz="1550" b="0" dirty="0" err="1">
+                <a:solidFill>
+                  <a:srgbClr val="B45309"/>
+                </a:solidFill>
+                <a:latin typeface="Arial"/>
+              </a:rPr>
+              <a:t>сравнение</a:t>
+            </a:r>
+            <a:r>
+              <a:rPr sz="1550" b="0" dirty="0">
+                <a:solidFill>
+                  <a:srgbClr val="B45309"/>
+                </a:solidFill>
+                <a:latin typeface="Arial"/>
+              </a:rPr>
+              <a:t> </a:t>
+            </a:r>
+            <a:r>
+              <a:rPr sz="1550" b="0" dirty="0" err="1">
+                <a:solidFill>
+                  <a:srgbClr val="B45309"/>
+                </a:solidFill>
+                <a:latin typeface="Arial"/>
+              </a:rPr>
+              <a:t>перефразированных</a:t>
+            </a:r>
+            <a:r>
+              <a:rPr sz="1550" b="0" dirty="0">
+                <a:solidFill>
+                  <a:srgbClr val="B45309"/>
+                </a:solidFill>
+                <a:latin typeface="Arial"/>
+              </a:rPr>
+              <a:t> </a:t>
+            </a:r>
+            <a:r>
+              <a:rPr sz="1550" b="0" dirty="0" err="1">
+                <a:solidFill>
+                  <a:srgbClr val="B45309"/>
+                </a:solidFill>
+                <a:latin typeface="Arial"/>
+              </a:rPr>
+              <a:t>фрагментов</a:t>
+            </a:r>
+            <a:r>
+              <a:rPr sz="1550" b="0" dirty="0">
+                <a:solidFill>
+                  <a:srgbClr val="B45309"/>
+                </a:solidFill>
+                <a:latin typeface="Arial"/>
+              </a:rPr>
+              <a:t>.</a:t>
             </a:r>
           </a:p>
         </p:txBody>
